--- a/public/fun/pack/pptx/reviewpro/보장점검양식프리미엄_28_가족점검_올리브브론즈.pptx
+++ b/public/fun/pack/pptx/reviewpro/보장점검양식프리미엄_28_가족점검_올리브브론즈.pptx
@@ -112,12 +112,12 @@
   <p:extLst>
     <p:ext uri="{521415D9-36F7-43E2-AB2F-B90AF26B5E84}">
       <p14:sectionLst xmlns:p14="http://schemas.microsoft.com/office/powerpoint/2010/main">
-        <p14:section name="시작" id="{9288971F-069F-4896-A468-9F39FEFC399D}">
+        <p14:section name="시작" id="{9D878EA6-8F2B-43F5-AC38-AD02BF256445}">
           <p14:sldIdLst>
             <p14:sldId id="256"/>
           </p14:sldIdLst>
         </p14:section>
-        <p14:section name="본문" id="{5D812E41-F2F8-4F8D-9196-2AAD541EEBFC}">
+        <p14:section name="본문" id="{DC2E9426-ACA5-4C13-BE1D-E75F68F4F178}">
           <p14:sldIdLst>
             <p14:sldId id="257"/>
             <p14:sldId id="258"/>
@@ -1616,7 +1616,7 @@
             </a:lvl1pPr>
           </a:lstStyle>
           <a:p>
-            <a:fld id="{E79B607C-1168-4343-83E9-23FE31507E9B}" type="slidenum">
+            <a:fld id="{301DC99D-3135-48AA-A5FF-D136B713CCD9}" type="slidenum">
               <a:rPr lang="en-US"/>
               <a:t>‹#›</a:t>
             </a:fld>
@@ -2285,7 +2285,7 @@
             </a:lvl1pPr>
           </a:lstStyle>
           <a:p>
-            <a:fld id="{6ACBDF7A-0248-49FE-AC12-CE27066A03E2}" type="slidenum">
+            <a:fld id="{54568C34-2712-4864-BE26-0DAEEDCEF032}" type="slidenum">
               <a:rPr lang="en-US"/>
               <a:t>‹#›</a:t>
             </a:fld>
@@ -2922,7 +2922,7 @@
             </a:lvl1pPr>
           </a:lstStyle>
           <a:p>
-            <a:fld id="{267EB9CA-E4D3-4599-A578-C1286E5AD6EF}" type="slidenum">
+            <a:fld id="{DABFA47D-A463-4E5F-9688-30C5DD1EF7E6}" type="slidenum">
               <a:rPr lang="en-US"/>
               <a:t>‹#›</a:t>
             </a:fld>
@@ -3783,7 +3783,7 @@
           <a:p>
             <a:r>
               <a:rPr lang="ko-KR"/>
-              <a:t>가족 점검 · 0000. 00. 00</a:t>
+              <a:t>가족 점검 · 날짜 입력</a:t>
             </a:r>
           </a:p>
           <a:p>
@@ -3874,7 +3874,7 @@
           <a:bodyPr/>
           <a:lstStyle/>
           <a:p>
-            <a:fld id="{67927159-F64D-4CA8-AFA6-7D595FB142B1}" type="slidenum">
+            <a:fld id="{5DF58166-0E9C-448B-BB59-440017D6CA75}" type="slidenum">
               <a:rPr lang="en-US"/>
               <a:t>‹#›</a:t>
             </a:fld>
@@ -4784,7 +4784,7 @@
           <a:bodyPr/>
           <a:lstStyle/>
           <a:p>
-            <a:fld id="{92531A54-C978-47EF-98FF-B2B0586418D7}" type="slidenum">
+            <a:fld id="{041D48DD-8DFC-415F-A8FA-02BCC1F0BA33}" type="slidenum">
               <a:rPr lang="en-US"/>
               <a:t>‹#›</a:t>
             </a:fld>
@@ -6290,7 +6290,7 @@
           <a:bodyPr/>
           <a:lstStyle/>
           <a:p>
-            <a:fld id="{296E827E-18E6-42C1-9097-D73BA694865C}" type="slidenum">
+            <a:fld id="{793FEF0F-5865-4170-804F-FC4CC26591C6}" type="slidenum">
               <a:rPr lang="en-US"/>
               <a:t>‹#›</a:t>
             </a:fld>
@@ -7840,7 +7840,7 @@
           <a:bodyPr/>
           <a:lstStyle/>
           <a:p>
-            <a:fld id="{82C7F22A-F288-4D4E-BD18-A18EC6FD513D}" type="slidenum">
+            <a:fld id="{CE0D3092-B928-4408-9FF6-E2C660D6DF0F}" type="slidenum">
               <a:rPr lang="en-US"/>
               <a:t>‹#›</a:t>
             </a:fld>
@@ -8786,7 +8786,7 @@
           <a:bodyPr/>
           <a:lstStyle/>
           <a:p>
-            <a:fld id="{51FB67E4-05E3-4BD6-A7FE-FEA99F2EDF61}" type="slidenum">
+            <a:fld id="{937BDAF1-9101-44D6-A9D9-98F95E49C613}" type="slidenum">
               <a:rPr lang="en-US"/>
               <a:t>‹#›</a:t>
             </a:fld>
